--- a/Dokumentation/Anleitung/Übersicht.pptx
+++ b/Dokumentation/Anleitung/Übersicht.pptx
@@ -104,6 +104,11 @@
       </a:defRPr>
     </a:lvl9pPr>
   </p:defaultTextStyle>
+  <p:extLst>
+    <p:ext uri="{EFAFB233-063F-42B5-8137-9DF3F51BA10A}">
+      <p15:sldGuideLst xmlns:p15="http://schemas.microsoft.com/office/powerpoint/2012/main"/>
+    </p:ext>
+  </p:extLst>
 </p:presentation>
 </file>
 
@@ -254,7 +259,7 @@
           <a:p>
             <a:fld id="{7B32BAF8-0F5C-47C5-A5DC-B8C45E5575F9}" type="datetimeFigureOut">
               <a:rPr lang="de-DE" smtClean="0"/>
-              <a:t>16.09.2026</a:t>
+              <a:t>17.09.2026</a:t>
             </a:fld>
             <a:endParaRPr lang="de-DE"/>
           </a:p>
@@ -452,7 +457,7 @@
           <a:p>
             <a:fld id="{7B32BAF8-0F5C-47C5-A5DC-B8C45E5575F9}" type="datetimeFigureOut">
               <a:rPr lang="de-DE" smtClean="0"/>
-              <a:t>16.09.2026</a:t>
+              <a:t>17.09.2026</a:t>
             </a:fld>
             <a:endParaRPr lang="de-DE"/>
           </a:p>
@@ -660,7 +665,7 @@
           <a:p>
             <a:fld id="{7B32BAF8-0F5C-47C5-A5DC-B8C45E5575F9}" type="datetimeFigureOut">
               <a:rPr lang="de-DE" smtClean="0"/>
-              <a:t>16.09.2026</a:t>
+              <a:t>17.09.2026</a:t>
             </a:fld>
             <a:endParaRPr lang="de-DE"/>
           </a:p>
@@ -858,7 +863,7 @@
           <a:p>
             <a:fld id="{7B32BAF8-0F5C-47C5-A5DC-B8C45E5575F9}" type="datetimeFigureOut">
               <a:rPr lang="de-DE" smtClean="0"/>
-              <a:t>16.09.2026</a:t>
+              <a:t>17.09.2026</a:t>
             </a:fld>
             <a:endParaRPr lang="de-DE"/>
           </a:p>
@@ -1133,7 +1138,7 @@
           <a:p>
             <a:fld id="{7B32BAF8-0F5C-47C5-A5DC-B8C45E5575F9}" type="datetimeFigureOut">
               <a:rPr lang="de-DE" smtClean="0"/>
-              <a:t>16.09.2026</a:t>
+              <a:t>17.09.2026</a:t>
             </a:fld>
             <a:endParaRPr lang="de-DE"/>
           </a:p>
@@ -1398,7 +1403,7 @@
           <a:p>
             <a:fld id="{7B32BAF8-0F5C-47C5-A5DC-B8C45E5575F9}" type="datetimeFigureOut">
               <a:rPr lang="de-DE" smtClean="0"/>
-              <a:t>16.09.2026</a:t>
+              <a:t>17.09.2026</a:t>
             </a:fld>
             <a:endParaRPr lang="de-DE"/>
           </a:p>
@@ -1810,7 +1815,7 @@
           <a:p>
             <a:fld id="{7B32BAF8-0F5C-47C5-A5DC-B8C45E5575F9}" type="datetimeFigureOut">
               <a:rPr lang="de-DE" smtClean="0"/>
-              <a:t>16.09.2026</a:t>
+              <a:t>17.09.2026</a:t>
             </a:fld>
             <a:endParaRPr lang="de-DE"/>
           </a:p>
@@ -1951,7 +1956,7 @@
           <a:p>
             <a:fld id="{7B32BAF8-0F5C-47C5-A5DC-B8C45E5575F9}" type="datetimeFigureOut">
               <a:rPr lang="de-DE" smtClean="0"/>
-              <a:t>16.09.2026</a:t>
+              <a:t>17.09.2026</a:t>
             </a:fld>
             <a:endParaRPr lang="de-DE"/>
           </a:p>
@@ -2064,7 +2069,7 @@
           <a:p>
             <a:fld id="{7B32BAF8-0F5C-47C5-A5DC-B8C45E5575F9}" type="datetimeFigureOut">
               <a:rPr lang="de-DE" smtClean="0"/>
-              <a:t>16.09.2026</a:t>
+              <a:t>17.09.2026</a:t>
             </a:fld>
             <a:endParaRPr lang="de-DE"/>
           </a:p>
@@ -2375,7 +2380,7 @@
           <a:p>
             <a:fld id="{7B32BAF8-0F5C-47C5-A5DC-B8C45E5575F9}" type="datetimeFigureOut">
               <a:rPr lang="de-DE" smtClean="0"/>
-              <a:t>16.09.2026</a:t>
+              <a:t>17.09.2026</a:t>
             </a:fld>
             <a:endParaRPr lang="de-DE"/>
           </a:p>
@@ -2663,7 +2668,7 @@
           <a:p>
             <a:fld id="{7B32BAF8-0F5C-47C5-A5DC-B8C45E5575F9}" type="datetimeFigureOut">
               <a:rPr lang="de-DE" smtClean="0"/>
-              <a:t>16.09.2026</a:t>
+              <a:t>17.09.2026</a:t>
             </a:fld>
             <a:endParaRPr lang="de-DE"/>
           </a:p>
@@ -2904,7 +2909,7 @@
           <a:p>
             <a:fld id="{7B32BAF8-0F5C-47C5-A5DC-B8C45E5575F9}" type="datetimeFigureOut">
               <a:rPr lang="de-DE" smtClean="0"/>
-              <a:t>16.09.2026</a:t>
+              <a:t>17.09.2026</a:t>
             </a:fld>
             <a:endParaRPr lang="de-DE"/>
           </a:p>
@@ -3596,13 +3601,13 @@
         </p:nvSpPr>
         <p:spPr>
           <a:xfrm>
-            <a:off x="6635796" y="6021722"/>
-            <a:ext cx="1867878" cy="612648"/>
+            <a:off x="5601969" y="5889029"/>
+            <a:ext cx="2983563" cy="926248"/>
           </a:xfrm>
           <a:prstGeom prst="wedgeRoundRectCallout">
             <a:avLst>
-              <a:gd name="adj1" fmla="val 4892"/>
-              <a:gd name="adj2" fmla="val -201949"/>
+              <a:gd name="adj1" fmla="val 21067"/>
+              <a:gd name="adj2" fmla="val -108713"/>
               <a:gd name="adj3" fmla="val 16667"/>
             </a:avLst>
           </a:prstGeom>
@@ -3629,21 +3634,21 @@
           <a:p>
             <a:pPr algn="ctr"/>
             <a:r>
-              <a:rPr lang="de-DE" sz="1000" dirty="0"/>
+              <a:rPr lang="de-DE" sz="2000" dirty="0"/>
               <a:t>Spannungsversorgung</a:t>
             </a:r>
             <a:br>
-              <a:rPr lang="de-DE" sz="1000" dirty="0"/>
+              <a:rPr lang="de-DE" sz="2000" dirty="0"/>
             </a:br>
             <a:r>
-              <a:rPr lang="de-DE" sz="1000" dirty="0"/>
+              <a:rPr lang="de-DE" sz="2000" dirty="0"/>
               <a:t>Mikrocontroller</a:t>
             </a:r>
             <a:br>
-              <a:rPr lang="de-DE" sz="1000" dirty="0"/>
+              <a:rPr lang="de-DE" sz="2000" dirty="0"/>
             </a:br>
             <a:r>
-              <a:rPr lang="de-DE" sz="1000" dirty="0"/>
+              <a:rPr lang="de-DE" sz="2000" dirty="0"/>
               <a:t>(Micro-USB)</a:t>
             </a:r>
           </a:p>
@@ -3663,13 +3668,13 @@
         </p:nvSpPr>
         <p:spPr>
           <a:xfrm>
-            <a:off x="8975650" y="5290407"/>
-            <a:ext cx="1867878" cy="612648"/>
+            <a:off x="8975650" y="5290406"/>
+            <a:ext cx="1971750" cy="731315"/>
           </a:xfrm>
           <a:prstGeom prst="wedgeRoundRectCallout">
             <a:avLst>
-              <a:gd name="adj1" fmla="val -95973"/>
-              <a:gd name="adj2" fmla="val -108791"/>
+              <a:gd name="adj1" fmla="val -62158"/>
+              <a:gd name="adj2" fmla="val -106186"/>
               <a:gd name="adj3" fmla="val 16667"/>
             </a:avLst>
           </a:prstGeom>
@@ -3696,14 +3701,14 @@
           <a:p>
             <a:pPr algn="ctr"/>
             <a:r>
-              <a:rPr lang="de-DE" sz="1000" dirty="0"/>
+              <a:rPr lang="de-DE" sz="2000" dirty="0"/>
               <a:t>PCAN-Adapter</a:t>
             </a:r>
             <a:br>
-              <a:rPr lang="de-DE" sz="1000" dirty="0"/>
+              <a:rPr lang="de-DE" sz="2000" dirty="0"/>
             </a:br>
             <a:r>
-              <a:rPr lang="de-DE" sz="1000" dirty="0"/>
+              <a:rPr lang="de-DE" sz="2000" dirty="0"/>
               <a:t>Sub-D 9 Polig</a:t>
             </a:r>
           </a:p>
@@ -3723,8 +3728,8 @@
         </p:nvSpPr>
         <p:spPr>
           <a:xfrm>
-            <a:off x="8893157" y="3722814"/>
-            <a:ext cx="1867878" cy="612648"/>
+            <a:off x="8893156" y="3722814"/>
+            <a:ext cx="2746393" cy="698055"/>
           </a:xfrm>
           <a:prstGeom prst="wedgeRoundRectCallout">
             <a:avLst>
@@ -3756,15 +3761,23 @@
           <a:p>
             <a:pPr algn="ctr"/>
             <a:r>
-              <a:rPr lang="de-DE" sz="1000" dirty="0"/>
+              <a:rPr lang="de-DE" sz="2000" dirty="0"/>
               <a:t>Spannungsversorgung</a:t>
             </a:r>
             <a:br>
-              <a:rPr lang="de-DE" sz="1000" dirty="0"/>
+              <a:rPr lang="de-DE" sz="2000" dirty="0"/>
             </a:br>
             <a:r>
-              <a:rPr lang="de-DE" sz="1000" dirty="0"/>
-              <a:t>Platine (35-70V)</a:t>
+              <a:rPr lang="de-DE" sz="2000" dirty="0"/>
+              <a:t>Platine </a:t>
+            </a:r>
+            <a:r>
+              <a:rPr lang="de-DE" sz="2000"/>
+              <a:t>(36-75V</a:t>
+            </a:r>
+            <a:r>
+              <a:rPr lang="de-DE" sz="2000" dirty="0"/>
+              <a:t>)</a:t>
             </a:r>
           </a:p>
         </p:txBody>
@@ -3831,13 +3844,13 @@
         </p:nvSpPr>
         <p:spPr>
           <a:xfrm>
-            <a:off x="5852160" y="2773680"/>
-            <a:ext cx="1572590" cy="418782"/>
+            <a:off x="5191743" y="2702771"/>
+            <a:ext cx="2381535" cy="869031"/>
           </a:xfrm>
           <a:prstGeom prst="wedgeRoundRectCallout">
             <a:avLst>
-              <a:gd name="adj1" fmla="val 73456"/>
-              <a:gd name="adj2" fmla="val 346547"/>
+              <a:gd name="adj1" fmla="val 60657"/>
+              <a:gd name="adj2" fmla="val 163142"/>
               <a:gd name="adj3" fmla="val 16667"/>
             </a:avLst>
           </a:prstGeom>
@@ -3864,14 +3877,14 @@
           <a:p>
             <a:pPr algn="ctr"/>
             <a:r>
-              <a:rPr lang="de-DE" sz="1000" dirty="0"/>
+              <a:rPr lang="de-DE" dirty="0"/>
               <a:t>Balance-Strommessung</a:t>
             </a:r>
             <a:br>
-              <a:rPr lang="de-DE" sz="1000" dirty="0"/>
+              <a:rPr lang="de-DE" dirty="0"/>
             </a:br>
             <a:r>
-              <a:rPr lang="de-DE" sz="1000" dirty="0"/>
+              <a:rPr lang="de-DE" dirty="0"/>
               <a:t>1V ≙ 1A</a:t>
             </a:r>
           </a:p>
@@ -3891,7 +3904,7 @@
         </p:nvSpPr>
         <p:spPr>
           <a:xfrm>
-            <a:off x="5963920" y="2275840"/>
+            <a:off x="5601970" y="2204931"/>
             <a:ext cx="309880" cy="497840"/>
           </a:xfrm>
           <a:prstGeom prst="triangle">
@@ -4194,57 +4207,8 @@
         </p:nvSpPr>
         <p:spPr>
           <a:xfrm>
-            <a:off x="3002131" y="3216888"/>
-            <a:ext cx="972052" cy="230911"/>
-          </a:xfrm>
-          <a:prstGeom prst="borderCallout2">
-            <a:avLst/>
-          </a:prstGeom>
-        </p:spPr>
-        <p:style>
-          <a:lnRef idx="2">
-            <a:schemeClr val="accent1">
-              <a:shade val="15000"/>
-            </a:schemeClr>
-          </a:lnRef>
-          <a:fillRef idx="1">
-            <a:schemeClr val="accent1"/>
-          </a:fillRef>
-          <a:effectRef idx="0">
-            <a:schemeClr val="accent1"/>
-          </a:effectRef>
-          <a:fontRef idx="minor">
-            <a:schemeClr val="lt1"/>
-          </a:fontRef>
-        </p:style>
-        <p:txBody>
-          <a:bodyPr rtlCol="0" anchor="ctr"/>
-          <a:lstStyle/>
-          <a:p>
-            <a:pPr algn="ctr"/>
-            <a:r>
-              <a:rPr lang="de-DE" dirty="0"/>
-              <a:t>1 (Bat-)</a:t>
-            </a:r>
-          </a:p>
-        </p:txBody>
-      </p:sp>
-      <p:sp>
-        <p:nvSpPr>
-          <p:cNvPr id="31" name="Legende: mit gebogener Linie 30">
-            <a:extLst>
-              <a:ext uri="{FF2B5EF4-FFF2-40B4-BE49-F238E27FC236}">
-                <a16:creationId xmlns:a16="http://schemas.microsoft.com/office/drawing/2014/main" id="{DE6E3ABA-02F0-D21B-6F8D-EC54F9EB3771}"/>
-              </a:ext>
-            </a:extLst>
-          </p:cNvPr>
-          <p:cNvSpPr/>
-          <p:nvPr/>
-        </p:nvSpPr>
-        <p:spPr>
-          <a:xfrm>
-            <a:off x="2554214" y="4258627"/>
-            <a:ext cx="280900" cy="230911"/>
+            <a:off x="3150846" y="2940051"/>
+            <a:ext cx="1177790" cy="405148"/>
           </a:xfrm>
           <a:prstGeom prst="borderCallout2">
             <a:avLst>
@@ -4252,8 +4216,8 @@
               <a:gd name="adj2" fmla="val -8333"/>
               <a:gd name="adj3" fmla="val 18750"/>
               <a:gd name="adj4" fmla="val -16667"/>
-              <a:gd name="adj5" fmla="val -23899"/>
-              <a:gd name="adj6" fmla="val -66560"/>
+              <a:gd name="adj5" fmla="val 149724"/>
+              <a:gd name="adj6" fmla="val -24562"/>
             </a:avLst>
           </a:prstGeom>
         </p:spPr>
@@ -4279,18 +4243,18 @@
           <a:p>
             <a:pPr algn="ctr"/>
             <a:r>
-              <a:rPr lang="de-DE" dirty="0"/>
-              <a:t>2</a:t>
-            </a:r>
-          </a:p>
-        </p:txBody>
-      </p:sp>
-      <p:sp>
-        <p:nvSpPr>
-          <p:cNvPr id="33" name="Legende: mit gebogener Linie 32">
-            <a:extLst>
-              <a:ext uri="{FF2B5EF4-FFF2-40B4-BE49-F238E27FC236}">
-                <a16:creationId xmlns:a16="http://schemas.microsoft.com/office/drawing/2014/main" id="{8CD21655-652D-2B80-4A34-A785726AF6C4}"/>
+              <a:rPr lang="de-DE" sz="2400" dirty="0"/>
+              <a:t>1 (Bat-)</a:t>
+            </a:r>
+          </a:p>
+        </p:txBody>
+      </p:sp>
+      <p:sp>
+        <p:nvSpPr>
+          <p:cNvPr id="31" name="Legende: mit gebogener Linie 30">
+            <a:extLst>
+              <a:ext uri="{FF2B5EF4-FFF2-40B4-BE49-F238E27FC236}">
+                <a16:creationId xmlns:a16="http://schemas.microsoft.com/office/drawing/2014/main" id="{DE6E3ABA-02F0-D21B-6F8D-EC54F9EB3771}"/>
               </a:ext>
             </a:extLst>
           </p:cNvPr>
@@ -4299,8 +4263,8 @@
         </p:nvSpPr>
         <p:spPr>
           <a:xfrm>
-            <a:off x="2323824" y="3017449"/>
-            <a:ext cx="280900" cy="230911"/>
+            <a:off x="2554213" y="4258627"/>
+            <a:ext cx="517105" cy="471788"/>
           </a:xfrm>
           <a:prstGeom prst="borderCallout2">
             <a:avLst>
@@ -4308,8 +4272,8 @@
               <a:gd name="adj2" fmla="val -8333"/>
               <a:gd name="adj3" fmla="val 18750"/>
               <a:gd name="adj4" fmla="val -16667"/>
-              <a:gd name="adj5" fmla="val 209299"/>
-              <a:gd name="adj6" fmla="val -21348"/>
+              <a:gd name="adj5" fmla="val -6851"/>
+              <a:gd name="adj6" fmla="val -39135"/>
             </a:avLst>
           </a:prstGeom>
         </p:spPr>
@@ -4335,18 +4299,18 @@
           <a:p>
             <a:pPr algn="ctr"/>
             <a:r>
-              <a:rPr lang="de-DE" dirty="0"/>
-              <a:t>3</a:t>
-            </a:r>
-          </a:p>
-        </p:txBody>
-      </p:sp>
-      <p:sp>
-        <p:nvSpPr>
-          <p:cNvPr id="35" name="Legende: mit gebogener Linie 34">
-            <a:extLst>
-              <a:ext uri="{FF2B5EF4-FFF2-40B4-BE49-F238E27FC236}">
-                <a16:creationId xmlns:a16="http://schemas.microsoft.com/office/drawing/2014/main" id="{096EB587-DD8C-EA94-646B-EBE7EDEF0228}"/>
+              <a:rPr lang="de-DE" sz="4000" dirty="0"/>
+              <a:t>2</a:t>
+            </a:r>
+          </a:p>
+        </p:txBody>
+      </p:sp>
+      <p:sp>
+        <p:nvSpPr>
+          <p:cNvPr id="33" name="Legende: mit gebogener Linie 32">
+            <a:extLst>
+              <a:ext uri="{FF2B5EF4-FFF2-40B4-BE49-F238E27FC236}">
+                <a16:creationId xmlns:a16="http://schemas.microsoft.com/office/drawing/2014/main" id="{8CD21655-652D-2B80-4A34-A785726AF6C4}"/>
               </a:ext>
             </a:extLst>
           </p:cNvPr>
@@ -4355,8 +4319,8 @@
         </p:nvSpPr>
         <p:spPr>
           <a:xfrm>
-            <a:off x="1731343" y="4420869"/>
-            <a:ext cx="280900" cy="230911"/>
+            <a:off x="2323823" y="2843213"/>
+            <a:ext cx="481289" cy="405148"/>
           </a:xfrm>
           <a:prstGeom prst="borderCallout2">
             <a:avLst>
@@ -4364,8 +4328,8 @@
               <a:gd name="adj2" fmla="val -8333"/>
               <a:gd name="adj3" fmla="val 18750"/>
               <a:gd name="adj4" fmla="val -16667"/>
-              <a:gd name="adj5" fmla="val -98698"/>
-              <a:gd name="adj6" fmla="val -26321"/>
+              <a:gd name="adj5" fmla="val 163737"/>
+              <a:gd name="adj6" fmla="val -17402"/>
             </a:avLst>
           </a:prstGeom>
         </p:spPr>
@@ -4391,18 +4355,18 @@
           <a:p>
             <a:pPr algn="ctr"/>
             <a:r>
-              <a:rPr lang="de-DE" dirty="0"/>
-              <a:t>4</a:t>
-            </a:r>
-          </a:p>
-        </p:txBody>
-      </p:sp>
-      <p:sp>
-        <p:nvSpPr>
-          <p:cNvPr id="37" name="Legende: mit gebogener Linie 36">
-            <a:extLst>
-              <a:ext uri="{FF2B5EF4-FFF2-40B4-BE49-F238E27FC236}">
-                <a16:creationId xmlns:a16="http://schemas.microsoft.com/office/drawing/2014/main" id="{BC7A513D-E481-E792-34EE-2112056FCC8A}"/>
+              <a:rPr lang="de-DE" sz="4000" dirty="0"/>
+              <a:t>3</a:t>
+            </a:r>
+          </a:p>
+        </p:txBody>
+      </p:sp>
+      <p:sp>
+        <p:nvSpPr>
+          <p:cNvPr id="35" name="Legende: mit gebogener Linie 34">
+            <a:extLst>
+              <a:ext uri="{FF2B5EF4-FFF2-40B4-BE49-F238E27FC236}">
+                <a16:creationId xmlns:a16="http://schemas.microsoft.com/office/drawing/2014/main" id="{096EB587-DD8C-EA94-646B-EBE7EDEF0228}"/>
               </a:ext>
             </a:extLst>
           </p:cNvPr>
@@ -4411,8 +4375,8 @@
         </p:nvSpPr>
         <p:spPr>
           <a:xfrm>
-            <a:off x="1684373" y="2997331"/>
-            <a:ext cx="280900" cy="230911"/>
+            <a:off x="1731342" y="4420869"/>
+            <a:ext cx="517105" cy="471788"/>
           </a:xfrm>
           <a:prstGeom prst="borderCallout2">
             <a:avLst>
@@ -4420,8 +4384,8 @@
               <a:gd name="adj2" fmla="val -8333"/>
               <a:gd name="adj3" fmla="val 18750"/>
               <a:gd name="adj4" fmla="val -16667"/>
-              <a:gd name="adj5" fmla="val 240099"/>
-              <a:gd name="adj6" fmla="val -34007"/>
+              <a:gd name="adj5" fmla="val -37682"/>
+              <a:gd name="adj6" fmla="val -13222"/>
             </a:avLst>
           </a:prstGeom>
         </p:spPr>
@@ -4447,18 +4411,18 @@
           <a:p>
             <a:pPr algn="ctr"/>
             <a:r>
-              <a:rPr lang="de-DE" dirty="0"/>
-              <a:t>5</a:t>
-            </a:r>
-          </a:p>
-        </p:txBody>
-      </p:sp>
-      <p:sp>
-        <p:nvSpPr>
-          <p:cNvPr id="39" name="Legende: mit gebogener Linie 38">
-            <a:extLst>
-              <a:ext uri="{FF2B5EF4-FFF2-40B4-BE49-F238E27FC236}">
-                <a16:creationId xmlns:a16="http://schemas.microsoft.com/office/drawing/2014/main" id="{6E1E046E-9584-D889-9825-2F41EE548265}"/>
+              <a:rPr lang="de-DE" sz="4000" dirty="0"/>
+              <a:t>4</a:t>
+            </a:r>
+          </a:p>
+        </p:txBody>
+      </p:sp>
+      <p:sp>
+        <p:nvSpPr>
+          <p:cNvPr id="37" name="Legende: mit gebogener Linie 36">
+            <a:extLst>
+              <a:ext uri="{FF2B5EF4-FFF2-40B4-BE49-F238E27FC236}">
+                <a16:creationId xmlns:a16="http://schemas.microsoft.com/office/drawing/2014/main" id="{BC7A513D-E481-E792-34EE-2112056FCC8A}"/>
               </a:ext>
             </a:extLst>
           </p:cNvPr>
@@ -4467,17 +4431,17 @@
         </p:nvSpPr>
         <p:spPr>
           <a:xfrm>
-            <a:off x="69850" y="4499504"/>
-            <a:ext cx="1065530" cy="230911"/>
+            <a:off x="1689005" y="2836396"/>
+            <a:ext cx="428573" cy="418781"/>
           </a:xfrm>
           <a:prstGeom prst="borderCallout2">
             <a:avLst>
-              <a:gd name="adj1" fmla="val 16550"/>
-              <a:gd name="adj2" fmla="val 89325"/>
-              <a:gd name="adj3" fmla="val -1050"/>
-              <a:gd name="adj4" fmla="val 97267"/>
-              <a:gd name="adj5" fmla="val -113364"/>
-              <a:gd name="adj6" fmla="val 113750"/>
+              <a:gd name="adj1" fmla="val 18750"/>
+              <a:gd name="adj2" fmla="val -8333"/>
+              <a:gd name="adj3" fmla="val 18750"/>
+              <a:gd name="adj4" fmla="val -16667"/>
+              <a:gd name="adj5" fmla="val 158598"/>
+              <a:gd name="adj6" fmla="val -18079"/>
             </a:avLst>
           </a:prstGeom>
         </p:spPr>
@@ -4503,7 +4467,63 @@
           <a:p>
             <a:pPr algn="ctr"/>
             <a:r>
-              <a:rPr lang="de-DE" dirty="0"/>
+              <a:rPr lang="de-DE" sz="4000" dirty="0"/>
+              <a:t>5</a:t>
+            </a:r>
+          </a:p>
+        </p:txBody>
+      </p:sp>
+      <p:sp>
+        <p:nvSpPr>
+          <p:cNvPr id="39" name="Legende: mit gebogener Linie 38">
+            <a:extLst>
+              <a:ext uri="{FF2B5EF4-FFF2-40B4-BE49-F238E27FC236}">
+                <a16:creationId xmlns:a16="http://schemas.microsoft.com/office/drawing/2014/main" id="{6E1E046E-9584-D889-9825-2F41EE548265}"/>
+              </a:ext>
+            </a:extLst>
+          </p:cNvPr>
+          <p:cNvSpPr/>
+          <p:nvPr/>
+        </p:nvSpPr>
+        <p:spPr>
+          <a:xfrm>
+            <a:off x="69849" y="4499504"/>
+            <a:ext cx="1217083" cy="436705"/>
+          </a:xfrm>
+          <a:prstGeom prst="borderCallout2">
+            <a:avLst>
+              <a:gd name="adj1" fmla="val 16550"/>
+              <a:gd name="adj2" fmla="val 89325"/>
+              <a:gd name="adj3" fmla="val -1050"/>
+              <a:gd name="adj4" fmla="val 97267"/>
+              <a:gd name="adj5" fmla="val -58109"/>
+              <a:gd name="adj6" fmla="val 101750"/>
+            </a:avLst>
+          </a:prstGeom>
+        </p:spPr>
+        <p:style>
+          <a:lnRef idx="2">
+            <a:schemeClr val="accent1">
+              <a:shade val="15000"/>
+            </a:schemeClr>
+          </a:lnRef>
+          <a:fillRef idx="1">
+            <a:schemeClr val="accent1"/>
+          </a:fillRef>
+          <a:effectRef idx="0">
+            <a:schemeClr val="accent1"/>
+          </a:effectRef>
+          <a:fontRef idx="minor">
+            <a:schemeClr val="lt1"/>
+          </a:fontRef>
+        </p:style>
+        <p:txBody>
+          <a:bodyPr rtlCol="0" anchor="ctr"/>
+          <a:lstStyle/>
+          <a:p>
+            <a:pPr algn="ctr"/>
+            <a:r>
+              <a:rPr lang="de-DE" sz="2400" dirty="0"/>
               <a:t>6 (Bat+)</a:t>
             </a:r>
           </a:p>
@@ -4836,13 +4856,13 @@
         </p:nvSpPr>
         <p:spPr>
           <a:xfrm>
-            <a:off x="69850" y="6343489"/>
-            <a:ext cx="1557441" cy="436705"/>
+            <a:off x="69850" y="6090291"/>
+            <a:ext cx="1974634" cy="724986"/>
           </a:xfrm>
           <a:prstGeom prst="wedgeRoundRectCallout">
             <a:avLst>
-              <a:gd name="adj1" fmla="val 85712"/>
-              <a:gd name="adj2" fmla="val -117086"/>
+              <a:gd name="adj1" fmla="val 76708"/>
+              <a:gd name="adj2" fmla="val -55774"/>
               <a:gd name="adj3" fmla="val 16667"/>
             </a:avLst>
           </a:prstGeom>
@@ -4869,7 +4889,7 @@
           <a:p>
             <a:pPr algn="ctr"/>
             <a:r>
-              <a:rPr lang="de-DE" sz="1000" dirty="0"/>
+              <a:rPr lang="de-DE" sz="2400" dirty="0"/>
               <a:t>LED-Testplatine</a:t>
             </a:r>
           </a:p>
